--- a/generated/Tier 1 Broker Scorecards/Get Logan Inc_Broker_Scorecard.pptx
+++ b/generated/Tier 1 Broker Scorecards/Get Logan Inc_Broker_Scorecard.pptx
@@ -3394,7 +3394,7 @@
                         <a:rPr sz="900">
                           <a:latin typeface="Segoe UI"/>
                         </a:rPr>
-                        <a:t>Tier 1  |  5.24% / 15.00%</a:t>
+                        <a:t>Tier 1  |  5.15% / 15.00%</a:t>
                       </a:r>
                     </a:p>
                   </a:txBody>
@@ -3653,7 +3653,7 @@
                         <a:rPr sz="900">
                           <a:latin typeface="Segoe UI"/>
                         </a:rPr>
-                        <a:t>Fleet Subs: 68  |  Binds: 4</a:t>
+                        <a:t>Fleet Subs: 69  |  Binds: 4</a:t>
                       </a:r>
                     </a:p>
                   </a:txBody>
@@ -3766,7 +3766,7 @@
                         <a:rPr sz="900">
                           <a:latin typeface="Segoe UI"/>
                         </a:rPr>
-                        <a:t>Non-Fleet Subs: 199  |  Binds: 10</a:t>
+                        <a:t>Non-Fleet Subs: 203  |  Binds: 10</a:t>
                       </a:r>
                     </a:p>
                   </a:txBody>
@@ -4428,7 +4428,7 @@
                           </a:solidFill>
                           <a:latin typeface="Segoe UI"/>
                         </a:rPr>
-                        <a:t>48</a:t>
+                        <a:t>53</a:t>
                       </a:r>
                     </a:p>
                   </a:txBody>
@@ -4707,7 +4707,7 @@
                           </a:solidFill>
                           <a:latin typeface="Segoe UI"/>
                         </a:rPr>
-                        <a:t>10.4%</a:t>
+                        <a:t>9.4%</a:t>
                       </a:r>
                     </a:p>
                   </a:txBody>

--- a/generated/Tier 1 Broker Scorecards/Get Logan Inc_Broker_Scorecard.pptx
+++ b/generated/Tier 1 Broker Scorecards/Get Logan Inc_Broker_Scorecard.pptx
@@ -3394,7 +3394,7 @@
                         <a:rPr sz="900">
                           <a:latin typeface="Segoe UI"/>
                         </a:rPr>
-                        <a:t>Tier 1  |  5.15% / 15.00%</a:t>
+                        <a:t>Tier 1  |  4.38% / 15.00%</a:t>
                       </a:r>
                     </a:p>
                   </a:txBody>
@@ -3690,7 +3690,7 @@
                         <a:rPr sz="900">
                           <a:latin typeface="Segoe UI"/>
                         </a:rPr>
-                        <a:t>Fleet Bound Premium: $437,620.88</a:t>
+                        <a:t>Fleet Bound Premium: $470,851.65</a:t>
                       </a:r>
                     </a:p>
                   </a:txBody>
@@ -3727,7 +3727,7 @@
                         <a:rPr sz="900">
                           <a:latin typeface="Segoe UI"/>
                         </a:rPr>
-                        <a:t>Fleet Book %: 55.6%</a:t>
+                        <a:t>Fleet Book %: 59.8%</a:t>
                       </a:r>
                     </a:p>
                   </a:txBody>
@@ -3766,7 +3766,7 @@
                         <a:rPr sz="900">
                           <a:latin typeface="Segoe UI"/>
                         </a:rPr>
-                        <a:t>Non-Fleet Subs: 203  |  Binds: 10</a:t>
+                        <a:t>Non-Fleet Subs: 205  |  Binds: 8</a:t>
                       </a:r>
                     </a:p>
                   </a:txBody>
@@ -3803,7 +3803,7 @@
                         <a:rPr sz="900">
                           <a:latin typeface="Segoe UI"/>
                         </a:rPr>
-                        <a:t>Non-Fleet Bound Premium: $349,712.33</a:t>
+                        <a:t>Non-Fleet Bound Premium: $316,481.56</a:t>
                       </a:r>
                     </a:p>
                   </a:txBody>
@@ -3840,7 +3840,7 @@
                         <a:rPr sz="900">
                           <a:latin typeface="Segoe UI"/>
                         </a:rPr>
-                        <a:t>Non-Fleet Book %: 44.4%</a:t>
+                        <a:t>Non-Fleet Book %: 40.2%</a:t>
                       </a:r>
                     </a:p>
                   </a:txBody>
@@ -4351,7 +4351,7 @@
                           </a:solidFill>
                           <a:latin typeface="Segoe UI"/>
                         </a:rPr>
-                        <a:t>94</a:t>
+                        <a:t>93</a:t>
                       </a:r>
                     </a:p>
                   </a:txBody>
@@ -4428,7 +4428,7 @@
                           </a:solidFill>
                           <a:latin typeface="Segoe UI"/>
                         </a:rPr>
-                        <a:t>53</a:t>
+                        <a:t>56</a:t>
                       </a:r>
                     </a:p>
                   </a:txBody>
@@ -4624,7 +4624,7 @@
                           </a:solidFill>
                           <a:latin typeface="Segoe UI"/>
                         </a:rPr>
-                        <a:t>9.6%</a:t>
+                        <a:t>8.6%</a:t>
                       </a:r>
                     </a:p>
                   </a:txBody>
@@ -4707,7 +4707,7 @@
                           </a:solidFill>
                           <a:latin typeface="Segoe UI"/>
                         </a:rPr>
-                        <a:t>9.4%</a:t>
+                        <a:t>5.4%</a:t>
                       </a:r>
                     </a:p>
                   </a:txBody>
@@ -4906,7 +4906,7 @@
                           </a:solidFill>
                           <a:latin typeface="Segoe UI"/>
                         </a:rPr>
-                        <a:t>9</a:t>
+                        <a:t>8</a:t>
                       </a:r>
                     </a:p>
                   </a:txBody>
@@ -4983,7 +4983,7 @@
                           </a:solidFill>
                           <a:latin typeface="Segoe UI"/>
                         </a:rPr>
-                        <a:t>5</a:t>
+                        <a:t>3</a:t>
                       </a:r>
                     </a:p>
                   </a:txBody>

--- a/generated/Tier 1 Broker Scorecards/Get Logan Inc_Broker_Scorecard.pptx
+++ b/generated/Tier 1 Broker Scorecards/Get Logan Inc_Broker_Scorecard.pptx
@@ -3357,7 +3357,7 @@
                         <a:rPr sz="800">
                           <a:latin typeface="Segoe UI"/>
                         </a:rPr>
-                        <a:t>$498,085.53 / $1,285,418.74 / $787,333.21</a:t>
+                        <a:t>$498,085.53 / $1,285,350.55 / $787,265.02</a:t>
                       </a:r>
                     </a:p>
                   </a:txBody>
@@ -3394,7 +3394,7 @@
                         <a:rPr sz="900">
                           <a:latin typeface="Segoe UI"/>
                         </a:rPr>
-                        <a:t>Tier 1  |  4.38% / 15.00%</a:t>
+                        <a:t>Tier 1  |  4.27% / 15.00%</a:t>
                       </a:r>
                     </a:p>
                   </a:txBody>
@@ -3653,7 +3653,7 @@
                         <a:rPr sz="900">
                           <a:latin typeface="Segoe UI"/>
                         </a:rPr>
-                        <a:t>Fleet Subs: 69  |  Binds: 4</a:t>
+                        <a:t>Fleet Subs: 70  |  Binds: 3</a:t>
                       </a:r>
                     </a:p>
                   </a:txBody>
@@ -3690,7 +3690,7 @@
                         <a:rPr sz="900">
                           <a:latin typeface="Segoe UI"/>
                         </a:rPr>
-                        <a:t>Fleet Bound Premium: $470,851.65</a:t>
+                        <a:t>Fleet Bound Premium: $416,285.23</a:t>
                       </a:r>
                     </a:p>
                   </a:txBody>
@@ -3727,7 +3727,7 @@
                         <a:rPr sz="900">
                           <a:latin typeface="Segoe UI"/>
                         </a:rPr>
-                        <a:t>Fleet Book %: 59.8%</a:t>
+                        <a:t>Fleet Book %: 52.9%</a:t>
                       </a:r>
                     </a:p>
                   </a:txBody>
@@ -3766,7 +3766,7 @@
                         <a:rPr sz="900">
                           <a:latin typeface="Segoe UI"/>
                         </a:rPr>
-                        <a:t>Non-Fleet Subs: 205  |  Binds: 8</a:t>
+                        <a:t>Non-Fleet Subs: 211  |  Binds: 9</a:t>
                       </a:r>
                     </a:p>
                   </a:txBody>
@@ -3803,7 +3803,7 @@
                         <a:rPr sz="900">
                           <a:latin typeface="Segoe UI"/>
                         </a:rPr>
-                        <a:t>Non-Fleet Bound Premium: $316,481.56</a:t>
+                        <a:t>Non-Fleet Bound Premium: $370,979.79</a:t>
                       </a:r>
                     </a:p>
                   </a:txBody>
@@ -3840,7 +3840,7 @@
                         <a:rPr sz="900">
                           <a:latin typeface="Segoe UI"/>
                         </a:rPr>
-                        <a:t>Non-Fleet Book %: 40.2%</a:t>
+                        <a:t>Non-Fleet Book %: 47.1%</a:t>
                       </a:r>
                     </a:p>
                   </a:txBody>
@@ -4351,7 +4351,7 @@
                           </a:solidFill>
                           <a:latin typeface="Segoe UI"/>
                         </a:rPr>
-                        <a:t>93</a:t>
+                        <a:t>94</a:t>
                       </a:r>
                     </a:p>
                   </a:txBody>
@@ -4428,7 +4428,7 @@
                           </a:solidFill>
                           <a:latin typeface="Segoe UI"/>
                         </a:rPr>
-                        <a:t>56</a:t>
+                        <a:t>64</a:t>
                       </a:r>
                     </a:p>
                   </a:txBody>
@@ -4624,7 +4624,7 @@
                           </a:solidFill>
                           <a:latin typeface="Segoe UI"/>
                         </a:rPr>
-                        <a:t>8.6%</a:t>
+                        <a:t>9.6%</a:t>
                       </a:r>
                     </a:p>
                   </a:txBody>
@@ -4707,7 +4707,7 @@
                           </a:solidFill>
                           <a:latin typeface="Segoe UI"/>
                         </a:rPr>
-                        <a:t>5.4%</a:t>
+                        <a:t>6.2%</a:t>
                       </a:r>
                     </a:p>
                   </a:txBody>
@@ -4906,7 +4906,7 @@
                           </a:solidFill>
                           <a:latin typeface="Segoe UI"/>
                         </a:rPr>
-                        <a:t>8</a:t>
+                        <a:t>9</a:t>
                       </a:r>
                     </a:p>
                   </a:txBody>
@@ -4983,7 +4983,7 @@
                           </a:solidFill>
                           <a:latin typeface="Segoe UI"/>
                         </a:rPr>
-                        <a:t>3</a:t>
+                        <a:t>4</a:t>
                       </a:r>
                     </a:p>
                   </a:txBody>
@@ -5262,7 +5262,7 @@
                           </a:solidFill>
                           <a:latin typeface="Segoe UI"/>
                         </a:rPr>
-                        <a:t>$39.4K</a:t>
+                        <a:t>$39.3K</a:t>
                       </a:r>
                     </a:p>
                   </a:txBody>

--- a/generated/Tier 1 Broker Scorecards/Get Logan Inc_Broker_Scorecard.pptx
+++ b/generated/Tier 1 Broker Scorecards/Get Logan Inc_Broker_Scorecard.pptx
@@ -3357,7 +3357,7 @@
                         <a:rPr sz="800">
                           <a:latin typeface="Segoe UI"/>
                         </a:rPr>
-                        <a:t>$498,085.53 / $1,285,350.55 / $787,265.02</a:t>
+                        <a:t>$498,085.53 / $1,282,849.51 / $784,763.98</a:t>
                       </a:r>
                     </a:p>
                   </a:txBody>
@@ -3394,7 +3394,7 @@
                         <a:rPr sz="900">
                           <a:latin typeface="Segoe UI"/>
                         </a:rPr>
-                        <a:t>Tier 1  |  4.27% / 15.00%</a:t>
+                        <a:t>Tier 1  |  4.20% / 15.00%</a:t>
                       </a:r>
                     </a:p>
                   </a:txBody>
@@ -3431,7 +3431,7 @@
                         <a:rPr sz="900">
                           <a:latin typeface="Segoe UI"/>
                         </a:rPr>
-                        <a:t>$697,319.74  (112.9% achieved)</a:t>
+                        <a:t>$697,319.74  (112.5% achieved)</a:t>
                       </a:r>
                     </a:p>
                   </a:txBody>
@@ -3653,7 +3653,7 @@
                         <a:rPr sz="900">
                           <a:latin typeface="Segoe UI"/>
                         </a:rPr>
-                        <a:t>Fleet Subs: 70  |  Binds: 3</a:t>
+                        <a:t>Fleet Subs: 72  |  Binds: 3</a:t>
                       </a:r>
                     </a:p>
                   </a:txBody>
@@ -3690,7 +3690,7 @@
                         <a:rPr sz="900">
                           <a:latin typeface="Segoe UI"/>
                         </a:rPr>
-                        <a:t>Fleet Bound Premium: $416,285.23</a:t>
+                        <a:t>Fleet Bound Premium: $419,067.70</a:t>
                       </a:r>
                     </a:p>
                   </a:txBody>
@@ -3727,7 +3727,7 @@
                         <a:rPr sz="900">
                           <a:latin typeface="Segoe UI"/>
                         </a:rPr>
-                        <a:t>Fleet Book %: 52.9%</a:t>
+                        <a:t>Fleet Book %: 53.4%</a:t>
                       </a:r>
                     </a:p>
                   </a:txBody>
@@ -3766,7 +3766,7 @@
                         <a:rPr sz="900">
                           <a:latin typeface="Segoe UI"/>
                         </a:rPr>
-                        <a:t>Non-Fleet Subs: 211  |  Binds: 9</a:t>
+                        <a:t>Non-Fleet Subs: 214  |  Binds: 9</a:t>
                       </a:r>
                     </a:p>
                   </a:txBody>
@@ -3803,7 +3803,7 @@
                         <a:rPr sz="900">
                           <a:latin typeface="Segoe UI"/>
                         </a:rPr>
-                        <a:t>Non-Fleet Bound Premium: $370,979.79</a:t>
+                        <a:t>Non-Fleet Bound Premium: $365,696.28</a:t>
                       </a:r>
                     </a:p>
                   </a:txBody>
@@ -3840,7 +3840,7 @@
                         <a:rPr sz="900">
                           <a:latin typeface="Segoe UI"/>
                         </a:rPr>
-                        <a:t>Non-Fleet Book %: 47.1%</a:t>
+                        <a:t>Non-Fleet Book %: 46.6%</a:t>
                       </a:r>
                     </a:p>
                   </a:txBody>
@@ -4428,7 +4428,7 @@
                           </a:solidFill>
                           <a:latin typeface="Segoe UI"/>
                         </a:rPr>
-                        <a:t>64</a:t>
+                        <a:t>70</a:t>
                       </a:r>
                     </a:p>
                   </a:txBody>
@@ -4707,7 +4707,7 @@
                           </a:solidFill>
                           <a:latin typeface="Segoe UI"/>
                         </a:rPr>
-                        <a:t>6.2%</a:t>
+                        <a:t>7.1%</a:t>
                       </a:r>
                     </a:p>
                   </a:txBody>
@@ -4983,7 +4983,7 @@
                           </a:solidFill>
                           <a:latin typeface="Segoe UI"/>
                         </a:rPr>
-                        <a:t>4</a:t>
+                        <a:t>5</a:t>
                       </a:r>
                     </a:p>
                   </a:txBody>
@@ -5262,7 +5262,7 @@
                           </a:solidFill>
                           <a:latin typeface="Segoe UI"/>
                         </a:rPr>
-                        <a:t>$39.3K</a:t>
+                        <a:t>$36.8K</a:t>
                       </a:r>
                     </a:p>
                   </a:txBody>

--- a/generated/Tier 1 Broker Scorecards/Get Logan Inc_Broker_Scorecard.pptx
+++ b/generated/Tier 1 Broker Scorecards/Get Logan Inc_Broker_Scorecard.pptx
@@ -3394,7 +3394,7 @@
                         <a:rPr sz="900">
                           <a:latin typeface="Segoe UI"/>
                         </a:rPr>
-                        <a:t>Tier 1  |  4.20% / 15.00%</a:t>
+                        <a:t>Tier 1  |  4.51% / 15.00%</a:t>
                       </a:r>
                     </a:p>
                   </a:txBody>
@@ -3653,7 +3653,7 @@
                         <a:rPr sz="900">
                           <a:latin typeface="Segoe UI"/>
                         </a:rPr>
-                        <a:t>Fleet Subs: 72  |  Binds: 3</a:t>
+                        <a:t>Fleet Subs: 73  |  Binds: 3</a:t>
                       </a:r>
                     </a:p>
                   </a:txBody>
@@ -3690,7 +3690,7 @@
                         <a:rPr sz="900">
                           <a:latin typeface="Segoe UI"/>
                         </a:rPr>
-                        <a:t>Fleet Bound Premium: $419,067.70</a:t>
+                        <a:t>Fleet Bound Premium: $380,596.43</a:t>
                       </a:r>
                     </a:p>
                   </a:txBody>
@@ -3727,7 +3727,7 @@
                         <a:rPr sz="900">
                           <a:latin typeface="Segoe UI"/>
                         </a:rPr>
-                        <a:t>Fleet Book %: 53.4%</a:t>
+                        <a:t>Fleet Book %: 48.5%</a:t>
                       </a:r>
                     </a:p>
                   </a:txBody>
@@ -3766,7 +3766,7 @@
                         <a:rPr sz="900">
                           <a:latin typeface="Segoe UI"/>
                         </a:rPr>
-                        <a:t>Non-Fleet Subs: 214  |  Binds: 9</a:t>
+                        <a:t>Non-Fleet Subs: 215  |  Binds: 10</a:t>
                       </a:r>
                     </a:p>
                   </a:txBody>
@@ -3803,7 +3803,7 @@
                         <a:rPr sz="900">
                           <a:latin typeface="Segoe UI"/>
                         </a:rPr>
-                        <a:t>Non-Fleet Bound Premium: $365,696.28</a:t>
+                        <a:t>Non-Fleet Bound Premium: $404,167.55</a:t>
                       </a:r>
                     </a:p>
                   </a:txBody>
@@ -3840,7 +3840,7 @@
                         <a:rPr sz="900">
                           <a:latin typeface="Segoe UI"/>
                         </a:rPr>
-                        <a:t>Non-Fleet Book %: 46.6%</a:t>
+                        <a:t>Non-Fleet Book %: 51.5%</a:t>
                       </a:r>
                     </a:p>
                   </a:txBody>
@@ -4428,7 +4428,7 @@
                           </a:solidFill>
                           <a:latin typeface="Segoe UI"/>
                         </a:rPr>
-                        <a:t>70</a:t>
+                        <a:t>72</a:t>
                       </a:r>
                     </a:p>
                   </a:txBody>
@@ -4707,7 +4707,7 @@
                           </a:solidFill>
                           <a:latin typeface="Segoe UI"/>
                         </a:rPr>
-                        <a:t>7.1%</a:t>
+                        <a:t>6.9%</a:t>
                       </a:r>
                     </a:p>
                   </a:txBody>

--- a/generated/Tier 1 Broker Scorecards/Get Logan Inc_Broker_Scorecard.pptx
+++ b/generated/Tier 1 Broker Scorecards/Get Logan Inc_Broker_Scorecard.pptx
@@ -4351,7 +4351,7 @@
                           </a:solidFill>
                           <a:latin typeface="Segoe UI"/>
                         </a:rPr>
-                        <a:t>94</a:t>
+                        <a:t>93</a:t>
                       </a:r>
                     </a:p>
                   </a:txBody>
@@ -4624,7 +4624,7 @@
                           </a:solidFill>
                           <a:latin typeface="Segoe UI"/>
                         </a:rPr>
-                        <a:t>9.6%</a:t>
+                        <a:t>8.6%</a:t>
                       </a:r>
                     </a:p>
                   </a:txBody>
@@ -4707,7 +4707,7 @@
                           </a:solidFill>
                           <a:latin typeface="Segoe UI"/>
                         </a:rPr>
-                        <a:t>6.9%</a:t>
+                        <a:t>5.6%</a:t>
                       </a:r>
                     </a:p>
                   </a:txBody>
@@ -4906,7 +4906,7 @@
                           </a:solidFill>
                           <a:latin typeface="Segoe UI"/>
                         </a:rPr>
-                        <a:t>9</a:t>
+                        <a:t>8</a:t>
                       </a:r>
                     </a:p>
                   </a:txBody>
@@ -4983,7 +4983,7 @@
                           </a:solidFill>
                           <a:latin typeface="Segoe UI"/>
                         </a:rPr>
-                        <a:t>5</a:t>
+                        <a:t>4</a:t>
                       </a:r>
                     </a:p>
                   </a:txBody>

--- a/generated/Tier 1 Broker Scorecards/Get Logan Inc_Broker_Scorecard.pptx
+++ b/generated/Tier 1 Broker Scorecards/Get Logan Inc_Broker_Scorecard.pptx
@@ -4351,7 +4351,7 @@
                           </a:solidFill>
                           <a:latin typeface="Segoe UI"/>
                         </a:rPr>
-                        <a:t>93</a:t>
+                        <a:t>94</a:t>
                       </a:r>
                     </a:p>
                   </a:txBody>
@@ -4624,7 +4624,7 @@
                           </a:solidFill>
                           <a:latin typeface="Segoe UI"/>
                         </a:rPr>
-                        <a:t>8.6%</a:t>
+                        <a:t>9.6%</a:t>
                       </a:r>
                     </a:p>
                   </a:txBody>
@@ -4707,7 +4707,7 @@
                           </a:solidFill>
                           <a:latin typeface="Segoe UI"/>
                         </a:rPr>
-                        <a:t>5.6%</a:t>
+                        <a:t>6.9%</a:t>
                       </a:r>
                     </a:p>
                   </a:txBody>
@@ -4906,7 +4906,7 @@
                           </a:solidFill>
                           <a:latin typeface="Segoe UI"/>
                         </a:rPr>
-                        <a:t>8</a:t>
+                        <a:t>9</a:t>
                       </a:r>
                     </a:p>
                   </a:txBody>
@@ -4983,7 +4983,7 @@
                           </a:solidFill>
                           <a:latin typeface="Segoe UI"/>
                         </a:rPr>
-                        <a:t>4</a:t>
+                        <a:t>5</a:t>
                       </a:r>
                     </a:p>
                   </a:txBody>

--- a/generated/Tier 1 Broker Scorecards/Get Logan Inc_Broker_Scorecard.pptx
+++ b/generated/Tier 1 Broker Scorecards/Get Logan Inc_Broker_Scorecard.pptx
@@ -3394,7 +3394,7 @@
                         <a:rPr sz="900">
                           <a:latin typeface="Segoe UI"/>
                         </a:rPr>
-                        <a:t>Tier 1  |  4.51% / 15.00%</a:t>
+                        <a:t>Tier 1  |  4.48% / 15.00%</a:t>
                       </a:r>
                     </a:p>
                   </a:txBody>
@@ -3653,7 +3653,7 @@
                         <a:rPr sz="900">
                           <a:latin typeface="Segoe UI"/>
                         </a:rPr>
-                        <a:t>Fleet Subs: 73  |  Binds: 3</a:t>
+                        <a:t>Fleet Subs: 74  |  Binds: 3</a:t>
                       </a:r>
                     </a:p>
                   </a:txBody>
@@ -3766,7 +3766,7 @@
                         <a:rPr sz="900">
                           <a:latin typeface="Segoe UI"/>
                         </a:rPr>
-                        <a:t>Non-Fleet Subs: 215  |  Binds: 10</a:t>
+                        <a:t>Non-Fleet Subs: 216  |  Binds: 10</a:t>
                       </a:r>
                     </a:p>
                   </a:txBody>
@@ -4351,7 +4351,7 @@
                           </a:solidFill>
                           <a:latin typeface="Segoe UI"/>
                         </a:rPr>
-                        <a:t>94</a:t>
+                        <a:t>93</a:t>
                       </a:r>
                     </a:p>
                   </a:txBody>
@@ -4428,7 +4428,7 @@
                           </a:solidFill>
                           <a:latin typeface="Segoe UI"/>
                         </a:rPr>
-                        <a:t>72</a:t>
+                        <a:t>74</a:t>
                       </a:r>
                     </a:p>
                   </a:txBody>
@@ -4624,7 +4624,7 @@
                           </a:solidFill>
                           <a:latin typeface="Segoe UI"/>
                         </a:rPr>
-                        <a:t>9.6%</a:t>
+                        <a:t>8.6%</a:t>
                       </a:r>
                     </a:p>
                   </a:txBody>
@@ -4707,7 +4707,7 @@
                           </a:solidFill>
                           <a:latin typeface="Segoe UI"/>
                         </a:rPr>
-                        <a:t>6.9%</a:t>
+                        <a:t>5.4%</a:t>
                       </a:r>
                     </a:p>
                   </a:txBody>
@@ -4906,7 +4906,7 @@
                           </a:solidFill>
                           <a:latin typeface="Segoe UI"/>
                         </a:rPr>
-                        <a:t>9</a:t>
+                        <a:t>8</a:t>
                       </a:r>
                     </a:p>
                   </a:txBody>
@@ -4983,7 +4983,7 @@
                           </a:solidFill>
                           <a:latin typeface="Segoe UI"/>
                         </a:rPr>
-                        <a:t>5</a:t>
+                        <a:t>4</a:t>
                       </a:r>
                     </a:p>
                   </a:txBody>

--- a/generated/Tier 1 Broker Scorecards/Get Logan Inc_Broker_Scorecard.pptx
+++ b/generated/Tier 1 Broker Scorecards/Get Logan Inc_Broker_Scorecard.pptx
@@ -3357,7 +3357,7 @@
                         <a:rPr sz="800">
                           <a:latin typeface="Segoe UI"/>
                         </a:rPr>
-                        <a:t>$498,085.53 / $1,282,849.51 / $784,763.98</a:t>
+                        <a:t>$498,085.53 / $1,331,498.64 / $833,413.11</a:t>
                       </a:r>
                     </a:p>
                   </a:txBody>
@@ -3394,7 +3394,7 @@
                         <a:rPr sz="900">
                           <a:latin typeface="Segoe UI"/>
                         </a:rPr>
-                        <a:t>Tier 1  |  4.48% / 15.00%</a:t>
+                        <a:t>Tier 1  |  4.81% / 15.00%</a:t>
                       </a:r>
                     </a:p>
                   </a:txBody>
@@ -3431,7 +3431,7 @@
                         <a:rPr sz="900">
                           <a:latin typeface="Segoe UI"/>
                         </a:rPr>
-                        <a:t>$697,319.74  (112.5% achieved)</a:t>
+                        <a:t>$697,319.74  (119.5% achieved)</a:t>
                       </a:r>
                     </a:p>
                   </a:txBody>
@@ -3690,7 +3690,7 @@
                         <a:rPr sz="900">
                           <a:latin typeface="Segoe UI"/>
                         </a:rPr>
-                        <a:t>Fleet Bound Premium: $380,596.43</a:t>
+                        <a:t>Fleet Bound Premium: $376,404.33</a:t>
                       </a:r>
                     </a:p>
                   </a:txBody>
@@ -3727,7 +3727,7 @@
                         <a:rPr sz="900">
                           <a:latin typeface="Segoe UI"/>
                         </a:rPr>
-                        <a:t>Fleet Book %: 48.5%</a:t>
+                        <a:t>Fleet Book %: 45.2%</a:t>
                       </a:r>
                     </a:p>
                   </a:txBody>
@@ -3766,7 +3766,7 @@
                         <a:rPr sz="900">
                           <a:latin typeface="Segoe UI"/>
                         </a:rPr>
-                        <a:t>Non-Fleet Subs: 216  |  Binds: 10</a:t>
+                        <a:t>Non-Fleet Subs: 217  |  Binds: 11</a:t>
                       </a:r>
                     </a:p>
                   </a:txBody>
@@ -3803,7 +3803,7 @@
                         <a:rPr sz="900">
                           <a:latin typeface="Segoe UI"/>
                         </a:rPr>
-                        <a:t>Non-Fleet Bound Premium: $404,167.55</a:t>
+                        <a:t>Non-Fleet Bound Premium: $457,008.78</a:t>
                       </a:r>
                     </a:p>
                   </a:txBody>
@@ -3840,7 +3840,7 @@
                         <a:rPr sz="900">
                           <a:latin typeface="Segoe UI"/>
                         </a:rPr>
-                        <a:t>Non-Fleet Book %: 51.5%</a:t>
+                        <a:t>Non-Fleet Book %: 54.8%</a:t>
                       </a:r>
                     </a:p>
                   </a:txBody>
@@ -4351,7 +4351,7 @@
                           </a:solidFill>
                           <a:latin typeface="Segoe UI"/>
                         </a:rPr>
-                        <a:t>93</a:t>
+                        <a:t>94</a:t>
                       </a:r>
                     </a:p>
                   </a:txBody>
@@ -4428,7 +4428,7 @@
                           </a:solidFill>
                           <a:latin typeface="Segoe UI"/>
                         </a:rPr>
-                        <a:t>74</a:t>
+                        <a:t>75</a:t>
                       </a:r>
                     </a:p>
                   </a:txBody>
@@ -4624,7 +4624,7 @@
                           </a:solidFill>
                           <a:latin typeface="Segoe UI"/>
                         </a:rPr>
-                        <a:t>8.6%</a:t>
+                        <a:t>9.6%</a:t>
                       </a:r>
                     </a:p>
                   </a:txBody>
@@ -4707,7 +4707,7 @@
                           </a:solidFill>
                           <a:latin typeface="Segoe UI"/>
                         </a:rPr>
-                        <a:t>5.4%</a:t>
+                        <a:t>8.0%</a:t>
                       </a:r>
                     </a:p>
                   </a:txBody>
@@ -4906,7 +4906,7 @@
                           </a:solidFill>
                           <a:latin typeface="Segoe UI"/>
                         </a:rPr>
-                        <a:t>8</a:t>
+                        <a:t>9</a:t>
                       </a:r>
                     </a:p>
                   </a:txBody>
@@ -4983,7 +4983,7 @@
                           </a:solidFill>
                           <a:latin typeface="Segoe UI"/>
                         </a:rPr>
-                        <a:t>4</a:t>
+                        <a:t>6</a:t>
                       </a:r>
                     </a:p>
                   </a:txBody>
@@ -5262,7 +5262,7 @@
                           </a:solidFill>
                           <a:latin typeface="Segoe UI"/>
                         </a:rPr>
-                        <a:t>$36.8K</a:t>
+                        <a:t>$85.4K</a:t>
                       </a:r>
                     </a:p>
                   </a:txBody>

--- a/generated/Tier 1 Broker Scorecards/Get Logan Inc_Broker_Scorecard.pptx
+++ b/generated/Tier 1 Broker Scorecards/Get Logan Inc_Broker_Scorecard.pptx
@@ -3394,7 +3394,7 @@
                         <a:rPr sz="900">
                           <a:latin typeface="Segoe UI"/>
                         </a:rPr>
-                        <a:t>Tier 1  |  4.81% / 15.00%</a:t>
+                        <a:t>Tier 1  |  4.73% / 15.00%</a:t>
                       </a:r>
                     </a:p>
                   </a:txBody>
@@ -3653,7 +3653,7 @@
                         <a:rPr sz="900">
                           <a:latin typeface="Segoe UI"/>
                         </a:rPr>
-                        <a:t>Fleet Subs: 74  |  Binds: 3</a:t>
+                        <a:t>Fleet Subs: 75  |  Binds: 3</a:t>
                       </a:r>
                     </a:p>
                   </a:txBody>
@@ -3766,7 +3766,7 @@
                         <a:rPr sz="900">
                           <a:latin typeface="Segoe UI"/>
                         </a:rPr>
-                        <a:t>Non-Fleet Subs: 217  |  Binds: 11</a:t>
+                        <a:t>Non-Fleet Subs: 221  |  Binds: 11</a:t>
                       </a:r>
                     </a:p>
                   </a:txBody>
@@ -4351,7 +4351,7 @@
                           </a:solidFill>
                           <a:latin typeface="Segoe UI"/>
                         </a:rPr>
-                        <a:t>94</a:t>
+                        <a:t>93</a:t>
                       </a:r>
                     </a:p>
                   </a:txBody>
@@ -4428,7 +4428,7 @@
                           </a:solidFill>
                           <a:latin typeface="Segoe UI"/>
                         </a:rPr>
-                        <a:t>75</a:t>
+                        <a:t>80</a:t>
                       </a:r>
                     </a:p>
                   </a:txBody>
@@ -4624,7 +4624,7 @@
                           </a:solidFill>
                           <a:latin typeface="Segoe UI"/>
                         </a:rPr>
-                        <a:t>9.6%</a:t>
+                        <a:t>8.6%</a:t>
                       </a:r>
                     </a:p>
                   </a:txBody>
@@ -4707,7 +4707,7 @@
                           </a:solidFill>
                           <a:latin typeface="Segoe UI"/>
                         </a:rPr>
-                        <a:t>8.0%</a:t>
+                        <a:t>6.2%</a:t>
                       </a:r>
                     </a:p>
                   </a:txBody>
@@ -4906,7 +4906,7 @@
                           </a:solidFill>
                           <a:latin typeface="Segoe UI"/>
                         </a:rPr>
-                        <a:t>9</a:t>
+                        <a:t>8</a:t>
                       </a:r>
                     </a:p>
                   </a:txBody>
@@ -4983,7 +4983,7 @@
                           </a:solidFill>
                           <a:latin typeface="Segoe UI"/>
                         </a:rPr>
-                        <a:t>6</a:t>
+                        <a:t>5</a:t>
                       </a:r>
                     </a:p>
                   </a:txBody>

--- a/generated/Tier 1 Broker Scorecards/Get Logan Inc_Broker_Scorecard.pptx
+++ b/generated/Tier 1 Broker Scorecards/Get Logan Inc_Broker_Scorecard.pptx
@@ -3394,7 +3394,7 @@
                         <a:rPr sz="900">
                           <a:latin typeface="Segoe UI"/>
                         </a:rPr>
-                        <a:t>Tier 1  |  4.73% / 15.00%</a:t>
+                        <a:t>Tier 1  |  4.68% / 15.00%</a:t>
                       </a:r>
                     </a:p>
                   </a:txBody>
@@ -3653,7 +3653,7 @@
                         <a:rPr sz="900">
                           <a:latin typeface="Segoe UI"/>
                         </a:rPr>
-                        <a:t>Fleet Subs: 75  |  Binds: 3</a:t>
+                        <a:t>Fleet Subs: 76  |  Binds: 3</a:t>
                       </a:r>
                     </a:p>
                   </a:txBody>
@@ -3766,7 +3766,7 @@
                         <a:rPr sz="900">
                           <a:latin typeface="Segoe UI"/>
                         </a:rPr>
-                        <a:t>Non-Fleet Subs: 221  |  Binds: 11</a:t>
+                        <a:t>Non-Fleet Subs: 223  |  Binds: 11</a:t>
                       </a:r>
                     </a:p>
                   </a:txBody>
@@ -4351,7 +4351,7 @@
                           </a:solidFill>
                           <a:latin typeface="Segoe UI"/>
                         </a:rPr>
-                        <a:t>93</a:t>
+                        <a:t>94</a:t>
                       </a:r>
                     </a:p>
                   </a:txBody>
@@ -4428,7 +4428,7 @@
                           </a:solidFill>
                           <a:latin typeface="Segoe UI"/>
                         </a:rPr>
-                        <a:t>80</a:t>
+                        <a:t>83</a:t>
                       </a:r>
                     </a:p>
                   </a:txBody>
@@ -4624,7 +4624,7 @@
                           </a:solidFill>
                           <a:latin typeface="Segoe UI"/>
                         </a:rPr>
-                        <a:t>8.6%</a:t>
+                        <a:t>9.6%</a:t>
                       </a:r>
                     </a:p>
                   </a:txBody>
@@ -4707,7 +4707,7 @@
                           </a:solidFill>
                           <a:latin typeface="Segoe UI"/>
                         </a:rPr>
-                        <a:t>6.2%</a:t>
+                        <a:t>7.2%</a:t>
                       </a:r>
                     </a:p>
                   </a:txBody>
@@ -4906,7 +4906,7 @@
                           </a:solidFill>
                           <a:latin typeface="Segoe UI"/>
                         </a:rPr>
-                        <a:t>8</a:t>
+                        <a:t>9</a:t>
                       </a:r>
                     </a:p>
                   </a:txBody>
@@ -4983,7 +4983,7 @@
                           </a:solidFill>
                           <a:latin typeface="Segoe UI"/>
                         </a:rPr>
-                        <a:t>5</a:t>
+                        <a:t>6</a:t>
                       </a:r>
                     </a:p>
                   </a:txBody>

--- a/generated/Tier 1 Broker Scorecards/Get Logan Inc_Broker_Scorecard.pptx
+++ b/generated/Tier 1 Broker Scorecards/Get Logan Inc_Broker_Scorecard.pptx
@@ -3357,7 +3357,7 @@
                         <a:rPr sz="800">
                           <a:latin typeface="Segoe UI"/>
                         </a:rPr>
-                        <a:t>$498,085.53 / $1,331,498.64 / $833,413.11</a:t>
+                        <a:t>$498,085.53 / $1,309,198.64 / $833,413.11</a:t>
                       </a:r>
                     </a:p>
                   </a:txBody>
